--- a/presentations/start-here/Start_Here_Narrated.pptx
+++ b/presentations/start-here/Start_Here_Narrated.pptx
@@ -167,7 +167,7 @@
     </p:spTree>
     <p:extLst>
       <p:ext uri="{BB962C8B-B14F-4D97-AF65-F5344CB8AC3E}">
-        <p14:creationId xmlns:p14="http://schemas.microsoft.com/office/powerpoint/2010/main" val="919736829"/>
+        <p14:creationId xmlns:p14="http://schemas.microsoft.com/office/powerpoint/2010/main" val="3954977311"/>
       </p:ext>
     </p:extLst>
   </p:cSld>
@@ -2099,7 +2099,7 @@
             <a:hlinkClick r:id="" action="ppaction://media"/>
             <a:extLst>
               <a:ext uri="{FF2B5EF4-FFF2-40B4-BE49-F238E27FC236}">
-                <a16:creationId xmlns:a16="http://schemas.microsoft.com/office/drawing/2014/main" id="{8D8C9711-AB44-06EB-0288-CFD325FB0AF6}"/>
+                <a16:creationId xmlns:a16="http://schemas.microsoft.com/office/drawing/2014/main" id="{061F519B-E997-2278-3C3C-8414FB19EE5E}"/>
               </a:ext>
             </a:extLst>
           </p:cNvPr>
@@ -2115,7 +2115,7 @@
                     <p:ext uri="{3AFAAA56-56D3-431D-BCD4-E75A35582382}">
                       <p173:tracksInfo xmlns:p173="http://schemas.microsoft.com/office/powerpoint/2017/3/main" displayLoc="slide">
                         <p173:trackLst>
-                          <p173:track id="{30BA8FFA-56C5-4D94-AC77-3865327BEB29}" label="English (captions)" lang="en-US" r:embed="rId6"/>
+                          <p173:track id="{472246B6-901C-488D-B395-D4A989BE1215}" label="English (captions)" lang="en-US" r:embed="rId6"/>
                         </p173:trackLst>
                       </p173:tracksInfo>
                     </p:ext>
@@ -2133,7 +2133,7 @@
         </p:blipFill>
         <p:spPr>
           <a:xfrm>
-            <a:off x="127000" y="6350000"/>
+            <a:off x="12446000" y="127000"/>
             <a:ext cx="304800" cy="304800"/>
           </a:xfrm>
           <a:prstGeom prst="rect">
@@ -3486,7 +3486,7 @@
             <a:hlinkClick r:id="" action="ppaction://media"/>
             <a:extLst>
               <a:ext uri="{FF2B5EF4-FFF2-40B4-BE49-F238E27FC236}">
-                <a16:creationId xmlns:a16="http://schemas.microsoft.com/office/drawing/2014/main" id="{6BEB03B8-3678-FD2C-5E84-00B583B50866}"/>
+                <a16:creationId xmlns:a16="http://schemas.microsoft.com/office/drawing/2014/main" id="{04658396-431D-6282-0FD3-B72C18725126}"/>
               </a:ext>
             </a:extLst>
           </p:cNvPr>
@@ -3502,7 +3502,7 @@
                     <p:ext uri="{3AFAAA56-56D3-431D-BCD4-E75A35582382}">
                       <p173:tracksInfo xmlns:p173="http://schemas.microsoft.com/office/powerpoint/2017/3/main" displayLoc="slide">
                         <p173:trackLst>
-                          <p173:track id="{74D955BD-D032-4BC3-9ACE-B00874625C99}" label="English (captions)" lang="en-US" r:embed="rId7"/>
+                          <p173:track id="{F9D63C00-F08E-4401-B362-A81A66CE8632}" label="English (captions)" lang="en-US" r:embed="rId7"/>
                         </p173:trackLst>
                       </p173:tracksInfo>
                     </p:ext>
@@ -3520,7 +3520,7 @@
         </p:blipFill>
         <p:spPr>
           <a:xfrm>
-            <a:off x="127000" y="6350000"/>
+            <a:off x="12446000" y="127000"/>
             <a:ext cx="304800" cy="304800"/>
           </a:xfrm>
           <a:prstGeom prst="rect">
@@ -4462,7 +4462,7 @@
             <a:hlinkClick r:id="" action="ppaction://media"/>
             <a:extLst>
               <a:ext uri="{FF2B5EF4-FFF2-40B4-BE49-F238E27FC236}">
-                <a16:creationId xmlns:a16="http://schemas.microsoft.com/office/drawing/2014/main" id="{CDCFD8CC-D4B3-D4FF-495F-20202EC6378B}"/>
+                <a16:creationId xmlns:a16="http://schemas.microsoft.com/office/drawing/2014/main" id="{D5B01A65-7486-9462-5470-5A8FF9405584}"/>
               </a:ext>
             </a:extLst>
           </p:cNvPr>
@@ -4478,7 +4478,7 @@
                     <p:ext uri="{3AFAAA56-56D3-431D-BCD4-E75A35582382}">
                       <p173:tracksInfo xmlns:p173="http://schemas.microsoft.com/office/powerpoint/2017/3/main" displayLoc="slide">
                         <p173:trackLst>
-                          <p173:track id="{F9206BE1-027E-466F-B3B4-7100D7BE280F}" label="English (captions)" lang="en-US" r:embed="rId7"/>
+                          <p173:track id="{96A0EA91-2C16-4BE0-8E3A-D1A4177D637C}" label="English (captions)" lang="en-US" r:embed="rId7"/>
                         </p173:trackLst>
                       </p173:tracksInfo>
                     </p:ext>
@@ -4496,7 +4496,7 @@
         </p:blipFill>
         <p:spPr>
           <a:xfrm>
-            <a:off x="127000" y="6350000"/>
+            <a:off x="12446000" y="127000"/>
             <a:ext cx="304800" cy="304800"/>
           </a:xfrm>
           <a:prstGeom prst="rect">
@@ -4997,7 +4997,7 @@
             <a:hlinkClick r:id="" action="ppaction://media"/>
             <a:extLst>
               <a:ext uri="{FF2B5EF4-FFF2-40B4-BE49-F238E27FC236}">
-                <a16:creationId xmlns:a16="http://schemas.microsoft.com/office/drawing/2014/main" id="{517F52D7-903A-729B-2C43-CE23AF66A1CA}"/>
+                <a16:creationId xmlns:a16="http://schemas.microsoft.com/office/drawing/2014/main" id="{492061D3-219C-F876-A7FC-794CBAF8EB0F}"/>
               </a:ext>
             </a:extLst>
           </p:cNvPr>
@@ -5013,7 +5013,7 @@
                     <p:ext uri="{3AFAAA56-56D3-431D-BCD4-E75A35582382}">
                       <p173:tracksInfo xmlns:p173="http://schemas.microsoft.com/office/powerpoint/2017/3/main" displayLoc="slide">
                         <p173:trackLst>
-                          <p173:track id="{9DC5422A-C097-47FD-B41F-33654DA4F396}" label="English (captions)" lang="en-US" r:embed="rId7"/>
+                          <p173:track id="{61DF3A4D-117C-434A-8F69-F298310FAE06}" label="English (captions)" lang="en-US" r:embed="rId7"/>
                         </p173:trackLst>
                       </p173:tracksInfo>
                     </p:ext>
@@ -5031,7 +5031,7 @@
         </p:blipFill>
         <p:spPr>
           <a:xfrm>
-            <a:off x="127000" y="6350000"/>
+            <a:off x="12446000" y="127000"/>
             <a:ext cx="304800" cy="304800"/>
           </a:xfrm>
           <a:prstGeom prst="rect">
@@ -6289,7 +6289,7 @@
             <a:hlinkClick r:id="" action="ppaction://media"/>
             <a:extLst>
               <a:ext uri="{FF2B5EF4-FFF2-40B4-BE49-F238E27FC236}">
-                <a16:creationId xmlns:a16="http://schemas.microsoft.com/office/drawing/2014/main" id="{ED1DA404-670C-67D9-3196-C03E9AE12831}"/>
+                <a16:creationId xmlns:a16="http://schemas.microsoft.com/office/drawing/2014/main" id="{B51CF62A-FF0D-FD2A-4DB0-C024E310EC34}"/>
               </a:ext>
             </a:extLst>
           </p:cNvPr>
@@ -6305,7 +6305,7 @@
                     <p:ext uri="{3AFAAA56-56D3-431D-BCD4-E75A35582382}">
                       <p173:tracksInfo xmlns:p173="http://schemas.microsoft.com/office/powerpoint/2017/3/main" displayLoc="slide">
                         <p173:trackLst>
-                          <p173:track id="{289CE7CB-34A6-4144-85D1-9B88297894A1}" label="English (captions)" lang="en-US" r:embed="rId7"/>
+                          <p173:track id="{7D426360-6E64-46EE-8B2D-511F58363BEC}" label="English (captions)" lang="en-US" r:embed="rId7"/>
                         </p173:trackLst>
                       </p173:tracksInfo>
                     </p:ext>
@@ -6323,7 +6323,7 @@
         </p:blipFill>
         <p:spPr>
           <a:xfrm>
-            <a:off x="127000" y="6350000"/>
+            <a:off x="12446000" y="127000"/>
             <a:ext cx="304800" cy="304800"/>
           </a:xfrm>
           <a:prstGeom prst="rect">
@@ -7676,7 +7676,7 @@
             <a:hlinkClick r:id="" action="ppaction://media"/>
             <a:extLst>
               <a:ext uri="{FF2B5EF4-FFF2-40B4-BE49-F238E27FC236}">
-                <a16:creationId xmlns:a16="http://schemas.microsoft.com/office/drawing/2014/main" id="{65F82154-2D9A-BCF1-D12F-3745AE15C196}"/>
+                <a16:creationId xmlns:a16="http://schemas.microsoft.com/office/drawing/2014/main" id="{346F2C58-D6BA-EF62-62D3-3A0DA73428D3}"/>
               </a:ext>
             </a:extLst>
           </p:cNvPr>
@@ -7692,7 +7692,7 @@
                     <p:ext uri="{3AFAAA56-56D3-431D-BCD4-E75A35582382}">
                       <p173:tracksInfo xmlns:p173="http://schemas.microsoft.com/office/powerpoint/2017/3/main" displayLoc="slide">
                         <p173:trackLst>
-                          <p173:track id="{1D8E57DA-BC96-40F5-BC62-9EA745531152}" label="English (captions)" lang="en-US" r:embed="rId7"/>
+                          <p173:track id="{3F74A404-4842-41E7-AA2B-55914D94F97D}" label="English (captions)" lang="en-US" r:embed="rId7"/>
                         </p173:trackLst>
                       </p173:tracksInfo>
                     </p:ext>
@@ -7710,7 +7710,7 @@
         </p:blipFill>
         <p:spPr>
           <a:xfrm>
-            <a:off x="127000" y="6350000"/>
+            <a:off x="12446000" y="127000"/>
             <a:ext cx="304800" cy="304800"/>
           </a:xfrm>
           <a:prstGeom prst="rect">
@@ -8392,7 +8392,7 @@
             <a:hlinkClick r:id="" action="ppaction://media"/>
             <a:extLst>
               <a:ext uri="{FF2B5EF4-FFF2-40B4-BE49-F238E27FC236}">
-                <a16:creationId xmlns:a16="http://schemas.microsoft.com/office/drawing/2014/main" id="{8DB0677E-22CF-7FE3-1B21-FF68B0274CD4}"/>
+                <a16:creationId xmlns:a16="http://schemas.microsoft.com/office/drawing/2014/main" id="{DC61A389-A158-9296-251C-9DF59D9EC6A1}"/>
               </a:ext>
             </a:extLst>
           </p:cNvPr>
@@ -8408,7 +8408,7 @@
                     <p:ext uri="{3AFAAA56-56D3-431D-BCD4-E75A35582382}">
                       <p173:tracksInfo xmlns:p173="http://schemas.microsoft.com/office/powerpoint/2017/3/main" displayLoc="slide">
                         <p173:trackLst>
-                          <p173:track id="{74E23DDF-84B5-441C-AF95-961F1FDFD91C}" label="English (captions)" lang="en-US" r:embed="rId6"/>
+                          <p173:track id="{AA238FAB-9E61-4A05-80D5-0AE424184A0D}" label="English (captions)" lang="en-US" r:embed="rId6"/>
                         </p173:trackLst>
                       </p173:tracksInfo>
                     </p:ext>
@@ -8426,7 +8426,7 @@
         </p:blipFill>
         <p:spPr>
           <a:xfrm>
-            <a:off x="127000" y="6350000"/>
+            <a:off x="12446000" y="127000"/>
             <a:ext cx="304800" cy="304800"/>
           </a:xfrm>
           <a:prstGeom prst="rect">
@@ -9707,7 +9707,7 @@
             <a:hlinkClick r:id="" action="ppaction://media"/>
             <a:extLst>
               <a:ext uri="{FF2B5EF4-FFF2-40B4-BE49-F238E27FC236}">
-                <a16:creationId xmlns:a16="http://schemas.microsoft.com/office/drawing/2014/main" id="{DCC7D4F9-1F85-A7C0-2356-8920F474E080}"/>
+                <a16:creationId xmlns:a16="http://schemas.microsoft.com/office/drawing/2014/main" id="{B0EE6673-8501-6F1E-F0CE-735F51C0A138}"/>
               </a:ext>
             </a:extLst>
           </p:cNvPr>
@@ -9723,7 +9723,7 @@
                     <p:ext uri="{3AFAAA56-56D3-431D-BCD4-E75A35582382}">
                       <p173:tracksInfo xmlns:p173="http://schemas.microsoft.com/office/powerpoint/2017/3/main" displayLoc="slide">
                         <p173:trackLst>
-                          <p173:track id="{4DE7B1E1-1DCA-4A0B-8C91-958AB9054612}" label="English (captions)" lang="en-US" r:embed="rId6"/>
+                          <p173:track id="{EAB90B9F-3A78-4215-9E35-98BC01CE289F}" label="English (captions)" lang="en-US" r:embed="rId6"/>
                         </p173:trackLst>
                       </p173:tracksInfo>
                     </p:ext>
@@ -9741,7 +9741,7 @@
         </p:blipFill>
         <p:spPr>
           <a:xfrm>
-            <a:off x="127000" y="6350000"/>
+            <a:off x="12446000" y="127000"/>
             <a:ext cx="304800" cy="304800"/>
           </a:xfrm>
           <a:prstGeom prst="rect">
@@ -11237,7 +11237,7 @@
             <a:hlinkClick r:id="" action="ppaction://media"/>
             <a:extLst>
               <a:ext uri="{FF2B5EF4-FFF2-40B4-BE49-F238E27FC236}">
-                <a16:creationId xmlns:a16="http://schemas.microsoft.com/office/drawing/2014/main" id="{A914E4D9-E5F2-5E44-8A1D-CBFF32A2EAAA}"/>
+                <a16:creationId xmlns:a16="http://schemas.microsoft.com/office/drawing/2014/main" id="{408CAE85-DE38-B895-061E-73E84646EE36}"/>
               </a:ext>
             </a:extLst>
           </p:cNvPr>
@@ -11253,7 +11253,7 @@
                     <p:ext uri="{3AFAAA56-56D3-431D-BCD4-E75A35582382}">
                       <p173:tracksInfo xmlns:p173="http://schemas.microsoft.com/office/powerpoint/2017/3/main" displayLoc="slide">
                         <p173:trackLst>
-                          <p173:track id="{3C2CFA84-6240-4A2B-93B0-9E50C54CD7DC}" label="English (captions)" lang="en-US" r:embed="rId7"/>
+                          <p173:track id="{26437D43-FCCF-4F1A-BA81-2BB114061816}" label="English (captions)" lang="en-US" r:embed="rId7"/>
                         </p173:trackLst>
                       </p173:tracksInfo>
                     </p:ext>
@@ -11271,7 +11271,7 @@
         </p:blipFill>
         <p:spPr>
           <a:xfrm>
-            <a:off x="127000" y="6350000"/>
+            <a:off x="12446000" y="127000"/>
             <a:ext cx="304800" cy="304800"/>
           </a:xfrm>
           <a:prstGeom prst="rect">
@@ -12398,7 +12398,7 @@
             <a:hlinkClick r:id="" action="ppaction://media"/>
             <a:extLst>
               <a:ext uri="{FF2B5EF4-FFF2-40B4-BE49-F238E27FC236}">
-                <a16:creationId xmlns:a16="http://schemas.microsoft.com/office/drawing/2014/main" id="{F376EB48-6443-4CF1-18C4-292CBAAF8811}"/>
+                <a16:creationId xmlns:a16="http://schemas.microsoft.com/office/drawing/2014/main" id="{576CBF19-DBE6-339F-90E1-1CDC1BFF9A78}"/>
               </a:ext>
             </a:extLst>
           </p:cNvPr>
@@ -12414,7 +12414,7 @@
                     <p:ext uri="{3AFAAA56-56D3-431D-BCD4-E75A35582382}">
                       <p173:tracksInfo xmlns:p173="http://schemas.microsoft.com/office/powerpoint/2017/3/main" displayLoc="slide">
                         <p173:trackLst>
-                          <p173:track id="{B6F73497-263D-4646-8C79-3CAB9247B460}" label="English (captions)" lang="en-US" r:embed="rId6"/>
+                          <p173:track id="{F1F1C86F-3360-476A-AABD-1D4C0272D2D9}" label="English (captions)" lang="en-US" r:embed="rId6"/>
                         </p173:trackLst>
                       </p173:tracksInfo>
                     </p:ext>
@@ -12432,7 +12432,7 @@
         </p:blipFill>
         <p:spPr>
           <a:xfrm>
-            <a:off x="127000" y="6350000"/>
+            <a:off x="12446000" y="127000"/>
             <a:ext cx="304800" cy="304800"/>
           </a:xfrm>
           <a:prstGeom prst="rect">
